--- a/it/slides/18-Architettura_dei_Calcolatori-Processore-Lab.pptx
+++ b/it/slides/18-Architettura_dei_Calcolatori-Processore-Lab.pptx
@@ -121,28 +121,28 @@
   <p:extLst>
     <p:ext uri="{521415D9-36F7-43E2-AB2F-B90AF26B5E84}">
       <p14:sectionLst xmlns:p14="http://schemas.microsoft.com/office/powerpoint/2010/main">
-        <p14:section name="Apertura" id="{c9b1e3fa-e00e-5184-40e4-817ff16feb4f}">
+        <p14:section name="Apertura" id="{18cf7806-7a2a-2d2d-a9dd-9b1ed02d7413}">
           <p14:sldIdLst>
             <p14:sldId id="256"/>
             <p14:sldId id="257"/>
           </p14:sldIdLst>
         </p14:section>
-        <p14:section name="Riscaldamento sulla macchina" id="{f707a34b-455e-0ec2-bdba-13a47561c94c}">
+        <p14:section name="Riscaldamento sulla macchina" id="{7e8fe5e4-a834-9c72-6788-7aa4158d937c}">
           <p14:sldIdLst>
             <p14:sldId id="258"/>
           </p14:sldIdLst>
         </p14:section>
-        <p14:section name="Lo stack" id="{ce4606fe-155d-457b-abce-2d37976db36b}">
+        <p14:section name="Lo stack" id="{d16cb99d-bc71-7bb7-fbc7-83ab2f41fb4a}">
           <p14:sldIdLst>
             <p14:sldId id="259"/>
           </p14:sldIdLst>
         </p14:section>
-        <p14:section name="Modelli di processore" id="{2c99ab55-7e23-7999-c1a4-6b6ab7334f48}">
+        <p14:section name="Modelli di processore" id="{d1b7bdb2-f568-5f9e-de40-787d7d341deb}">
           <p14:sldIdLst>
             <p14:sldId id="260"/>
           </p14:sldIdLst>
         </p14:section>
-        <p14:section name="Il programma completo" id="{2c3272e7-1ba9-c0f9-1206-4aa30a835507}">
+        <p14:section name="Il programma completo" id="{5d21e211-3dfb-6a68-caf3-977a468d4d00}">
           <p14:sldIdLst>
             <p14:sldId id="261"/>
             <p14:sldId id="262"/>
@@ -150,7 +150,7 @@
             <p14:sldId id="264"/>
           </p14:sldIdLst>
         </p14:section>
-        <p14:section name="Eseguire e provare" id="{0a5831ec-de4c-db74-d3c0-be02d9eb8fb2}">
+        <p14:section name="Eseguire e provare" id="{37a788f9-8e73-f53b-6d7d-7fcf77af8064}">
           <p14:sldIdLst>
             <p14:sldId id="265"/>
             <p14:sldId id="266"/>
@@ -159,7 +159,7 @@
             <p14:sldId id="269"/>
           </p14:sldIdLst>
         </p14:section>
-        <p14:section name="Esercizi" id="{72ea9f10-fb0e-b5ef-063c-f37c84dfd8a3}">
+        <p14:section name="Esercizi" id="{01c6fbcf-4bbf-40fb-26d9-8069d64c35af}">
           <p14:sldIdLst>
             <p14:sldId id="270"/>
           </p14:sldIdLst>

--- a/it/slides/18-Architettura_dei_Calcolatori-Processore-Lab.pptx
+++ b/it/slides/18-Architettura_dei_Calcolatori-Processore-Lab.pptx
@@ -121,28 +121,28 @@
   <p:extLst>
     <p:ext uri="{521415D9-36F7-43E2-AB2F-B90AF26B5E84}">
       <p14:sectionLst xmlns:p14="http://schemas.microsoft.com/office/powerpoint/2010/main">
-        <p14:section name="Apertura" id="{18cf7806-7a2a-2d2d-a9dd-9b1ed02d7413}">
+        <p14:section name="Apertura" id="{ed64fbd9-b43e-ed9e-b82d-6438b1accc1c}">
           <p14:sldIdLst>
             <p14:sldId id="256"/>
             <p14:sldId id="257"/>
           </p14:sldIdLst>
         </p14:section>
-        <p14:section name="Riscaldamento sulla macchina" id="{7e8fe5e4-a834-9c72-6788-7aa4158d937c}">
+        <p14:section name="Riscaldamento sulla macchina" id="{db81e605-568e-723d-15fa-1d64fe13a51d}">
           <p14:sldIdLst>
             <p14:sldId id="258"/>
           </p14:sldIdLst>
         </p14:section>
-        <p14:section name="Lo stack" id="{d16cb99d-bc71-7bb7-fbc7-83ab2f41fb4a}">
+        <p14:section name="Lo stack" id="{9659cfb1-4222-a0ce-d750-fb0bde05f81c}">
           <p14:sldIdLst>
             <p14:sldId id="259"/>
           </p14:sldIdLst>
         </p14:section>
-        <p14:section name="Modelli di processore" id="{d1b7bdb2-f568-5f9e-de40-787d7d341deb}">
+        <p14:section name="Modelli di processore" id="{11bd9da0-1ae8-08f9-b507-4fd103123ea5}">
           <p14:sldIdLst>
             <p14:sldId id="260"/>
           </p14:sldIdLst>
         </p14:section>
-        <p14:section name="Il programma completo" id="{5d21e211-3dfb-6a68-caf3-977a468d4d00}">
+        <p14:section name="Il programma completo" id="{9202eff3-10e1-42f3-74c2-09f9a437177a}">
           <p14:sldIdLst>
             <p14:sldId id="261"/>
             <p14:sldId id="262"/>
@@ -150,7 +150,7 @@
             <p14:sldId id="264"/>
           </p14:sldIdLst>
         </p14:section>
-        <p14:section name="Eseguire e provare" id="{37a788f9-8e73-f53b-6d7d-7fcf77af8064}">
+        <p14:section name="Eseguire e provare" id="{264df790-4940-346d-d9a5-baffc48351a5}">
           <p14:sldIdLst>
             <p14:sldId id="265"/>
             <p14:sldId id="266"/>
@@ -159,7 +159,7 @@
             <p14:sldId id="269"/>
           </p14:sldIdLst>
         </p14:section>
-        <p14:section name="Esercizi" id="{01c6fbcf-4bbf-40fb-26d9-8069d64c35af}">
+        <p14:section name="Esercizi" id="{77f30774-e4c0-fbe9-e766-3279ba825533}">
           <p14:sldIdLst>
             <p14:sldId id="270"/>
           </p14:sldIdLst>
@@ -570,7 +570,8 @@
               <a:rPr lang="en-US" dirty="0"/>
               <a:t>Questa è la presentazione del codice della Lezione 18. Mentre la presentazione della lezione sviluppa i concetti, questa raccoglie tutto ciò che si scrive e si esegue: ogni listato con il suo commento, il programma completo della lezione, il risultato che deve produrre, e la procedura per provarlo su ciascuno dei tre host. Le due presentazioni vanno lette insieme: i concetti spiegano il codice, e il codice dà ai concetti una conseguenza osservabile.
 Stato di apprendimento: DA COMPRENDERE OGGI, alla fine di questa lezione lo spiegate, lo seguite passo passo e lo applicate da soli; DA UTILIZZARE OGGI, oggi seguite e usate la ricetta; come funziona dentro si spiega più avanti, o non fa parte del corso; DA COMPRENDERE PIÙ AVANTI, riconoscete il nome e lo scopo; lo spiega una lezione successiva. Una slide senza etichetta è contesto: una storia, un esempio, una domanda, un esercizio.
-Stato di apprendimento di questa lezione. DA COMPRENDERE OGGI: accumulatore, pila, registri; il modello del processore; i registri di RISC-V; la convenzione di chiamata; la pila; il processore RV32. DA UTILIZZARE OGGI: il programma completo, gli strumenti di PRG32 (si usa, non si studia, in questo corso). DA COMPRENDERE PIÙ AVANTI: interruzioni e trap (Lezione 19). Una slide senza etichetta è contesto: una storia, un esempio, una domanda, un esercizio.</a:t>
+Stato di apprendimento di questa lezione. DA COMPRENDERE OGGI: accumulatore, pila, registri; il modello del processore; i registri di RISC-V; la convenzione di chiamata; la pila; il processore RV32. DA UTILIZZARE OGGI: il programma completo, gli strumenti di PRG32 (si usa, non si studia, in questo corso). DA COMPRENDERE PIÙ AVANTI: interruzioni e trap (Lezione 19). Una slide senza etichetta è contesto: una storia, un esempio, una domanda, un esercizio.
+Percorso. I risultati di oggi: (1) seguire un'istruzione attraverso i blocchi di un processore RV32; (2) usare correttamente lo stack e la convenzione di chiamata; (3) confrontare macchine ad accumulatore, a stack e a registri. Si appoggia su: solo ciò che ha preparato la Lezione 01. Prossimo passo: Lezione 19, Istruzioni e interruzioni.</a:t>
             </a:r>
             <a:endParaRPr lang="en-US" dirty="0"/>
           </a:p>
